--- a/AgenticAI/5-Tools-and-Framework/RAG-1-ChatBOT-QA-RetrieveFromOnePDF-WithLangChain-NoAgent/README-Langchain-Setup-Installation.pptx
+++ b/AgenticAI/5-Tools-and-Framework/RAG-1-ChatBOT-QA-RetrieveFromOnePDF-WithLangChain-NoAgent/README-Langchain-Setup-Installation.pptx
@@ -5,17 +5,16 @@
     <p:sldMasterId id="2147483648" r:id="rId1"/>
   </p:sldMasterIdLst>
   <p:notesMasterIdLst>
-    <p:notesMasterId r:id="rId7"/>
+    <p:notesMasterId r:id="rId6"/>
   </p:notesMasterIdLst>
   <p:handoutMasterIdLst>
-    <p:handoutMasterId r:id="rId8"/>
+    <p:handoutMasterId r:id="rId7"/>
   </p:handoutMasterIdLst>
   <p:sldIdLst>
     <p:sldId id="257" r:id="rId2"/>
     <p:sldId id="276" r:id="rId3"/>
     <p:sldId id="278" r:id="rId4"/>
-    <p:sldId id="279" r:id="rId5"/>
-    <p:sldId id="275" r:id="rId6"/>
+    <p:sldId id="275" r:id="rId5"/>
   </p:sldIdLst>
   <p:sldSz cx="12192000" cy="6858000"/>
   <p:notesSz cx="6858000" cy="9144000"/>
@@ -219,7 +218,7 @@
           <a:p>
             <a:fld id="{7BAEECA8-D063-486F-AE31-5020270C1449}" type="datetimeFigureOut">
               <a:rPr lang="en-US" smtClean="0"/>
-              <a:t>3/28/2026</a:t>
+              <a:t>6/23/2026</a:t>
             </a:fld>
             <a:endParaRPr lang="en-US"/>
           </a:p>
@@ -396,7 +395,7 @@
           <a:p>
             <a:fld id="{CB233BD1-3BA8-448D-9D08-7846095EA517}" type="datetimeFigureOut">
               <a:rPr lang="en-US" smtClean="0"/>
-              <a:t>3/28/2026</a:t>
+              <a:t>6/23/2026</a:t>
             </a:fld>
             <a:endParaRPr lang="en-US"/>
           </a:p>
@@ -810,7 +809,7 @@
           <a:p>
             <a:fld id="{6383FAE1-13DE-4511-8C1B-C8AFB720664C}" type="datetimeFigureOut">
               <a:rPr lang="en-US" smtClean="0"/>
-              <a:t>3/28/2026</a:t>
+              <a:t>6/23/2026</a:t>
             </a:fld>
             <a:endParaRPr lang="en-US"/>
           </a:p>
@@ -1008,7 +1007,7 @@
           <a:p>
             <a:fld id="{6383FAE1-13DE-4511-8C1B-C8AFB720664C}" type="datetimeFigureOut">
               <a:rPr lang="en-US" smtClean="0"/>
-              <a:t>3/28/2026</a:t>
+              <a:t>6/23/2026</a:t>
             </a:fld>
             <a:endParaRPr lang="en-US"/>
           </a:p>
@@ -1216,7 +1215,7 @@
           <a:p>
             <a:fld id="{6383FAE1-13DE-4511-8C1B-C8AFB720664C}" type="datetimeFigureOut">
               <a:rPr lang="en-US" smtClean="0"/>
-              <a:t>3/28/2026</a:t>
+              <a:t>6/23/2026</a:t>
             </a:fld>
             <a:endParaRPr lang="en-US"/>
           </a:p>
@@ -1414,7 +1413,7 @@
           <a:p>
             <a:fld id="{6383FAE1-13DE-4511-8C1B-C8AFB720664C}" type="datetimeFigureOut">
               <a:rPr lang="en-US" smtClean="0"/>
-              <a:t>3/28/2026</a:t>
+              <a:t>6/23/2026</a:t>
             </a:fld>
             <a:endParaRPr lang="en-US"/>
           </a:p>
@@ -1689,7 +1688,7 @@
           <a:p>
             <a:fld id="{6383FAE1-13DE-4511-8C1B-C8AFB720664C}" type="datetimeFigureOut">
               <a:rPr lang="en-US" smtClean="0"/>
-              <a:t>3/28/2026</a:t>
+              <a:t>6/23/2026</a:t>
             </a:fld>
             <a:endParaRPr lang="en-US"/>
           </a:p>
@@ -1954,7 +1953,7 @@
           <a:p>
             <a:fld id="{6383FAE1-13DE-4511-8C1B-C8AFB720664C}" type="datetimeFigureOut">
               <a:rPr lang="en-US" smtClean="0"/>
-              <a:t>3/28/2026</a:t>
+              <a:t>6/23/2026</a:t>
             </a:fld>
             <a:endParaRPr lang="en-US"/>
           </a:p>
@@ -2366,7 +2365,7 @@
           <a:p>
             <a:fld id="{6383FAE1-13DE-4511-8C1B-C8AFB720664C}" type="datetimeFigureOut">
               <a:rPr lang="en-US" smtClean="0"/>
-              <a:t>3/28/2026</a:t>
+              <a:t>6/23/2026</a:t>
             </a:fld>
             <a:endParaRPr lang="en-US"/>
           </a:p>
@@ -2507,7 +2506,7 @@
           <a:p>
             <a:fld id="{6383FAE1-13DE-4511-8C1B-C8AFB720664C}" type="datetimeFigureOut">
               <a:rPr lang="en-US" smtClean="0"/>
-              <a:t>3/28/2026</a:t>
+              <a:t>6/23/2026</a:t>
             </a:fld>
             <a:endParaRPr lang="en-US"/>
           </a:p>
@@ -2620,7 +2619,7 @@
           <a:p>
             <a:fld id="{6383FAE1-13DE-4511-8C1B-C8AFB720664C}" type="datetimeFigureOut">
               <a:rPr lang="en-US" smtClean="0"/>
-              <a:t>3/28/2026</a:t>
+              <a:t>6/23/2026</a:t>
             </a:fld>
             <a:endParaRPr lang="en-US"/>
           </a:p>
@@ -2931,7 +2930,7 @@
           <a:p>
             <a:fld id="{6383FAE1-13DE-4511-8C1B-C8AFB720664C}" type="datetimeFigureOut">
               <a:rPr lang="en-US" smtClean="0"/>
-              <a:t>3/28/2026</a:t>
+              <a:t>6/23/2026</a:t>
             </a:fld>
             <a:endParaRPr lang="en-US"/>
           </a:p>
@@ -3222,7 +3221,7 @@
           <a:p>
             <a:fld id="{6383FAE1-13DE-4511-8C1B-C8AFB720664C}" type="datetimeFigureOut">
               <a:rPr lang="en-US" smtClean="0"/>
-              <a:t>3/28/2026</a:t>
+              <a:t>6/23/2026</a:t>
             </a:fld>
             <a:endParaRPr lang="en-US"/>
           </a:p>
@@ -3466,7 +3465,7 @@
           <a:p>
             <a:fld id="{6383FAE1-13DE-4511-8C1B-C8AFB720664C}" type="datetimeFigureOut">
               <a:rPr lang="en-US" smtClean="0"/>
-              <a:t>3/28/2026</a:t>
+              <a:t>6/23/2026</a:t>
             </a:fld>
             <a:endParaRPr lang="en-US"/>
           </a:p>
@@ -4315,7 +4314,7 @@
                   </a:schemeClr>
                 </a:solidFill>
               </a:rPr>
-              <a:t>&gt; C:\Users\hi\AppData\Local\Programs\Python\Python310\python.exe -m </a:t>
+              <a:t>&gt; C:\Users\hi\AppData\Local\Programs\Python\Python311\python.exe -m </a:t>
             </a:r>
             <a:r>
               <a:rPr lang="en-US" sz="2400" dirty="0" err="1">
@@ -4529,7 +4528,7 @@
         <p:spPr>
           <a:xfrm>
             <a:off x="477520" y="226536"/>
-            <a:ext cx="10292080" cy="3416320"/>
+            <a:ext cx="10292080" cy="4154984"/>
           </a:xfrm>
           <a:prstGeom prst="rect">
             <a:avLst/>
@@ -4582,7 +4581,7 @@
                   </a:schemeClr>
                 </a:solidFill>
               </a:rPr>
-              <a:t>### 3) Install </a:t>
+              <a:t>3) Install </a:t>
             </a:r>
             <a:r>
               <a:rPr lang="en-US" sz="2400" b="1" dirty="0" err="1">
@@ -4680,6 +4679,59 @@
             </a:endParaRPr>
           </a:p>
           <a:p>
+            <a:endParaRPr lang="en-US" sz="2400" b="1" dirty="0">
+              <a:solidFill>
+                <a:schemeClr val="accent6">
+                  <a:lumMod val="60000"/>
+                  <a:lumOff val="40000"/>
+                </a:schemeClr>
+              </a:solidFill>
+            </a:endParaRPr>
+          </a:p>
+          <a:p>
+            <a:r>
+              <a:rPr lang="en-US" sz="2400" b="1" dirty="0">
+                <a:solidFill>
+                  <a:schemeClr val="accent6">
+                    <a:lumMod val="60000"/>
+                    <a:lumOff val="40000"/>
+                  </a:schemeClr>
+                </a:solidFill>
+              </a:rPr>
+              <a:t>4) Run </a:t>
+            </a:r>
+            <a:r>
+              <a:rPr lang="en-US" sz="2400" b="1" dirty="0" err="1">
+                <a:solidFill>
+                  <a:schemeClr val="accent6">
+                    <a:lumMod val="60000"/>
+                    <a:lumOff val="40000"/>
+                  </a:schemeClr>
+                </a:solidFill>
+              </a:rPr>
+              <a:t>jupyter</a:t>
+            </a:r>
+            <a:r>
+              <a:rPr lang="en-US" sz="2400" b="1" dirty="0">
+                <a:solidFill>
+                  <a:schemeClr val="accent6">
+                    <a:lumMod val="60000"/>
+                    <a:lumOff val="40000"/>
+                  </a:schemeClr>
+                </a:solidFill>
+              </a:rPr>
+              <a:t>:</a:t>
+            </a:r>
+            <a:endParaRPr lang="en-US" sz="2400" dirty="0">
+              <a:solidFill>
+                <a:schemeClr val="accent6">
+                  <a:lumMod val="60000"/>
+                  <a:lumOff val="40000"/>
+                </a:schemeClr>
+              </a:solidFill>
+            </a:endParaRPr>
+          </a:p>
+          <a:p>
             <a:br>
               <a:rPr lang="en-US" sz="2400" dirty="0">
                 <a:solidFill>
@@ -4691,59 +4743,6 @@
               </a:rPr>
             </a:br>
             <a:r>
-              <a:rPr lang="en-US" sz="2400" b="1" dirty="0">
-                <a:solidFill>
-                  <a:schemeClr val="accent6">
-                    <a:lumMod val="60000"/>
-                    <a:lumOff val="40000"/>
-                  </a:schemeClr>
-                </a:solidFill>
-              </a:rPr>
-              <a:t>### 4) Run </a:t>
-            </a:r>
-            <a:r>
-              <a:rPr lang="en-US" sz="2400" b="1" dirty="0" err="1">
-                <a:solidFill>
-                  <a:schemeClr val="accent6">
-                    <a:lumMod val="60000"/>
-                    <a:lumOff val="40000"/>
-                  </a:schemeClr>
-                </a:solidFill>
-              </a:rPr>
-              <a:t>jupyter</a:t>
-            </a:r>
-            <a:r>
-              <a:rPr lang="en-US" sz="2400" b="1" dirty="0">
-                <a:solidFill>
-                  <a:schemeClr val="accent6">
-                    <a:lumMod val="60000"/>
-                    <a:lumOff val="40000"/>
-                  </a:schemeClr>
-                </a:solidFill>
-              </a:rPr>
-              <a:t>:</a:t>
-            </a:r>
-            <a:endParaRPr lang="en-US" sz="2400" dirty="0">
-              <a:solidFill>
-                <a:schemeClr val="accent6">
-                  <a:lumMod val="60000"/>
-                  <a:lumOff val="40000"/>
-                </a:schemeClr>
-              </a:solidFill>
-            </a:endParaRPr>
-          </a:p>
-          <a:p>
-            <a:br>
-              <a:rPr lang="en-US" sz="2400" dirty="0">
-                <a:solidFill>
-                  <a:schemeClr val="accent6">
-                    <a:lumMod val="60000"/>
-                    <a:lumOff val="40000"/>
-                  </a:schemeClr>
-                </a:solidFill>
-              </a:rPr>
-            </a:br>
-            <a:r>
               <a:rPr lang="en-US" sz="2400" dirty="0">
                 <a:solidFill>
                   <a:schemeClr val="accent6">
@@ -4776,6 +4775,37 @@
               </a:rPr>
               <a:t> notebook</a:t>
             </a:r>
+          </a:p>
+          <a:p>
+            <a:endParaRPr lang="en-US" sz="2400" dirty="0">
+              <a:solidFill>
+                <a:schemeClr val="accent6">
+                  <a:lumMod val="60000"/>
+                  <a:lumOff val="40000"/>
+                </a:schemeClr>
+              </a:solidFill>
+            </a:endParaRPr>
+          </a:p>
+          <a:p>
+            <a:r>
+              <a:rPr lang="en-US" sz="2400">
+                <a:solidFill>
+                  <a:schemeClr val="accent6">
+                    <a:lumMod val="60000"/>
+                    <a:lumOff val="40000"/>
+                  </a:schemeClr>
+                </a:solidFill>
+              </a:rPr>
+              <a:t>5) Install packages inside requirements.txt file</a:t>
+            </a:r>
+            <a:endParaRPr lang="en-US" sz="2400" dirty="0">
+              <a:solidFill>
+                <a:schemeClr val="accent6">
+                  <a:lumMod val="60000"/>
+                  <a:lumOff val="40000"/>
+                </a:schemeClr>
+              </a:solidFill>
+            </a:endParaRPr>
           </a:p>
         </p:txBody>
       </p:sp>
@@ -4793,514 +4823,6 @@
 </file>
 
 <file path=ppt/slides/slide4.xml><?xml version="1.0" encoding="utf-8"?>
-<p:sld xmlns:a="http://schemas.openxmlformats.org/drawingml/2006/main" xmlns:r="http://schemas.openxmlformats.org/officeDocument/2006/relationships" xmlns:p="http://schemas.openxmlformats.org/presentationml/2006/main">
-  <p:cSld>
-    <p:spTree>
-      <p:nvGrpSpPr>
-        <p:cNvPr id="1" name="">
-          <a:extLst>
-            <a:ext uri="{FF2B5EF4-FFF2-40B4-BE49-F238E27FC236}">
-              <a16:creationId xmlns:a16="http://schemas.microsoft.com/office/drawing/2014/main" id="{5921FD0A-9CB0-ED03-189F-7860E3564DCE}"/>
-            </a:ext>
-          </a:extLst>
-        </p:cNvPr>
-        <p:cNvGrpSpPr/>
-        <p:nvPr/>
-      </p:nvGrpSpPr>
-      <p:grpSpPr>
-        <a:xfrm>
-          <a:off x="0" y="0"/>
-          <a:ext cx="0" cy="0"/>
-          <a:chOff x="0" y="0"/>
-          <a:chExt cx="0" cy="0"/>
-        </a:xfrm>
-      </p:grpSpPr>
-      <p:sp>
-        <p:nvSpPr>
-          <p:cNvPr id="9" name="TextBox 8">
-            <a:extLst>
-              <a:ext uri="{FF2B5EF4-FFF2-40B4-BE49-F238E27FC236}">
-                <a16:creationId xmlns:a16="http://schemas.microsoft.com/office/drawing/2014/main" id="{8E508F31-9080-9643-AF6F-8FDE60C8AC82}"/>
-              </a:ext>
-            </a:extLst>
-          </p:cNvPr>
-          <p:cNvSpPr txBox="1"/>
-          <p:nvPr/>
-        </p:nvSpPr>
-        <p:spPr>
-          <a:xfrm>
-            <a:off x="477520" y="226536"/>
-            <a:ext cx="11208512" cy="6740307"/>
-          </a:xfrm>
-          <a:prstGeom prst="rect">
-            <a:avLst/>
-          </a:prstGeom>
-          <a:noFill/>
-        </p:spPr>
-        <p:txBody>
-          <a:bodyPr wrap="square">
-            <a:spAutoFit/>
-          </a:bodyPr>
-          <a:lstStyle/>
-          <a:p>
-            <a:r>
-              <a:rPr lang="en-US" sz="2400" b="1" dirty="0">
-                <a:solidFill>
-                  <a:schemeClr val="accent6">
-                    <a:lumMod val="60000"/>
-                    <a:lumOff val="40000"/>
-                  </a:schemeClr>
-                </a:solidFill>
-              </a:rPr>
-              <a:t># STEPS</a:t>
-            </a:r>
-            <a:endParaRPr lang="en-US" sz="2400" dirty="0">
-              <a:solidFill>
-                <a:schemeClr val="accent6">
-                  <a:lumMod val="60000"/>
-                  <a:lumOff val="40000"/>
-                </a:schemeClr>
-              </a:solidFill>
-            </a:endParaRPr>
-          </a:p>
-          <a:p>
-            <a:br>
-              <a:rPr lang="en-US" sz="2400" dirty="0">
-                <a:solidFill>
-                  <a:schemeClr val="accent6">
-                    <a:lumMod val="60000"/>
-                    <a:lumOff val="40000"/>
-                  </a:schemeClr>
-                </a:solidFill>
-              </a:rPr>
-            </a:br>
-            <a:r>
-              <a:rPr lang="en-US" sz="2400" b="1" dirty="0">
-                <a:solidFill>
-                  <a:schemeClr val="accent6">
-                    <a:lumMod val="60000"/>
-                    <a:lumOff val="40000"/>
-                  </a:schemeClr>
-                </a:solidFill>
-              </a:rPr>
-              <a:t>### 5) Install following packages from </a:t>
-            </a:r>
-            <a:r>
-              <a:rPr lang="en-US" sz="2400" b="1" dirty="0" err="1">
-                <a:solidFill>
-                  <a:schemeClr val="accent6">
-                    <a:lumMod val="60000"/>
-                    <a:lumOff val="40000"/>
-                  </a:schemeClr>
-                </a:solidFill>
-              </a:rPr>
-              <a:t>jupyter</a:t>
-            </a:r>
-            <a:r>
-              <a:rPr lang="en-US" sz="2400" b="1" dirty="0">
-                <a:solidFill>
-                  <a:schemeClr val="accent6">
-                    <a:lumMod val="60000"/>
-                    <a:lumOff val="40000"/>
-                  </a:schemeClr>
-                </a:solidFill>
-              </a:rPr>
-              <a:t> (or use python virtual end):</a:t>
-            </a:r>
-            <a:endParaRPr lang="en-US" sz="2400" dirty="0">
-              <a:solidFill>
-                <a:schemeClr val="accent6">
-                  <a:lumMod val="60000"/>
-                  <a:lumOff val="40000"/>
-                </a:schemeClr>
-              </a:solidFill>
-            </a:endParaRPr>
-          </a:p>
-          <a:p>
-            <a:br>
-              <a:rPr lang="en-US" sz="2400" dirty="0">
-                <a:solidFill>
-                  <a:schemeClr val="accent6">
-                    <a:lumMod val="60000"/>
-                    <a:lumOff val="40000"/>
-                  </a:schemeClr>
-                </a:solidFill>
-              </a:rPr>
-            </a:br>
-            <a:endParaRPr lang="en-US" sz="2400" dirty="0">
-              <a:solidFill>
-                <a:schemeClr val="accent6">
-                  <a:lumMod val="60000"/>
-                  <a:lumOff val="40000"/>
-                </a:schemeClr>
-              </a:solidFill>
-            </a:endParaRPr>
-          </a:p>
-          <a:p>
-            <a:r>
-              <a:rPr lang="en-US" sz="2400" b="1" dirty="0">
-                <a:solidFill>
-                  <a:schemeClr val="accent6">
-                    <a:lumMod val="60000"/>
-                    <a:lumOff val="40000"/>
-                  </a:schemeClr>
-                </a:solidFill>
-              </a:rPr>
-              <a:t>#### From </a:t>
-            </a:r>
-            <a:r>
-              <a:rPr lang="en-US" sz="2400" b="1" dirty="0" err="1">
-                <a:solidFill>
-                  <a:schemeClr val="accent6">
-                    <a:lumMod val="60000"/>
-                    <a:lumOff val="40000"/>
-                  </a:schemeClr>
-                </a:solidFill>
-              </a:rPr>
-              <a:t>Jupyter</a:t>
-            </a:r>
-            <a:r>
-              <a:rPr lang="en-US" sz="2400" b="1" dirty="0">
-                <a:solidFill>
-                  <a:schemeClr val="accent6">
-                    <a:lumMod val="60000"/>
-                    <a:lumOff val="40000"/>
-                  </a:schemeClr>
-                </a:solidFill>
-              </a:rPr>
-              <a:t> (Took 5 minutes)</a:t>
-            </a:r>
-            <a:endParaRPr lang="en-US" sz="2400" dirty="0">
-              <a:solidFill>
-                <a:schemeClr val="accent6">
-                  <a:lumMod val="60000"/>
-                  <a:lumOff val="40000"/>
-                </a:schemeClr>
-              </a:solidFill>
-            </a:endParaRPr>
-          </a:p>
-          <a:p>
-            <a:r>
-              <a:rPr lang="en-US" sz="2400" dirty="0">
-                <a:solidFill>
-                  <a:schemeClr val="accent6">
-                    <a:lumMod val="60000"/>
-                    <a:lumOff val="40000"/>
-                  </a:schemeClr>
-                </a:solidFill>
-              </a:rPr>
-              <a:t>&gt; !pip install </a:t>
-            </a:r>
-            <a:r>
-              <a:rPr lang="en-US" sz="2400" dirty="0" err="1">
-                <a:solidFill>
-                  <a:schemeClr val="accent6">
-                    <a:lumMod val="60000"/>
-                    <a:lumOff val="40000"/>
-                  </a:schemeClr>
-                </a:solidFill>
-              </a:rPr>
-              <a:t>langchain</a:t>
-            </a:r>
-            <a:r>
-              <a:rPr lang="en-US" sz="2400" dirty="0">
-                <a:solidFill>
-                  <a:schemeClr val="accent6">
-                    <a:lumMod val="60000"/>
-                    <a:lumOff val="40000"/>
-                  </a:schemeClr>
-                </a:solidFill>
-              </a:rPr>
-              <a:t>==0.2.14 </a:t>
-            </a:r>
-            <a:r>
-              <a:rPr lang="en-US" sz="2400" dirty="0" err="1">
-                <a:solidFill>
-                  <a:schemeClr val="accent6">
-                    <a:lumMod val="60000"/>
-                    <a:lumOff val="40000"/>
-                  </a:schemeClr>
-                </a:solidFill>
-              </a:rPr>
-              <a:t>langchain</a:t>
-            </a:r>
-            <a:r>
-              <a:rPr lang="en-US" sz="2400" dirty="0">
-                <a:solidFill>
-                  <a:schemeClr val="accent6">
-                    <a:lumMod val="60000"/>
-                    <a:lumOff val="40000"/>
-                  </a:schemeClr>
-                </a:solidFill>
-              </a:rPr>
-              <a:t>-community==0.2.12 </a:t>
-            </a:r>
-            <a:r>
-              <a:rPr lang="en-US" sz="2400" dirty="0" err="1">
-                <a:solidFill>
-                  <a:schemeClr val="accent6">
-                    <a:lumMod val="60000"/>
-                    <a:lumOff val="40000"/>
-                  </a:schemeClr>
-                </a:solidFill>
-              </a:rPr>
-              <a:t>langchain-openai</a:t>
-            </a:r>
-            <a:r>
-              <a:rPr lang="en-US" sz="2400" dirty="0">
-                <a:solidFill>
-                  <a:schemeClr val="accent6">
-                    <a:lumMod val="60000"/>
-                    <a:lumOff val="40000"/>
-                  </a:schemeClr>
-                </a:solidFill>
-              </a:rPr>
-              <a:t>==0.1.25</a:t>
-            </a:r>
-          </a:p>
-          <a:p>
-            <a:endParaRPr lang="en-US" sz="2400" dirty="0">
-              <a:solidFill>
-                <a:schemeClr val="accent6">
-                  <a:lumMod val="60000"/>
-                  <a:lumOff val="40000"/>
-                </a:schemeClr>
-              </a:solidFill>
-            </a:endParaRPr>
-          </a:p>
-          <a:p>
-            <a:r>
-              <a:rPr lang="en-US" sz="2400" dirty="0">
-                <a:solidFill>
-                  <a:schemeClr val="accent6">
-                    <a:lumMod val="60000"/>
-                    <a:lumOff val="40000"/>
-                  </a:schemeClr>
-                </a:solidFill>
-              </a:rPr>
-              <a:t>OR</a:t>
-            </a:r>
-          </a:p>
-          <a:p>
-            <a:br>
-              <a:rPr lang="en-US" sz="2400" dirty="0">
-                <a:solidFill>
-                  <a:schemeClr val="accent6">
-                    <a:lumMod val="60000"/>
-                    <a:lumOff val="40000"/>
-                  </a:schemeClr>
-                </a:solidFill>
-              </a:rPr>
-            </a:br>
-            <a:r>
-              <a:rPr lang="en-US" sz="2400" b="1" dirty="0">
-                <a:solidFill>
-                  <a:schemeClr val="accent6">
-                    <a:lumMod val="60000"/>
-                    <a:lumOff val="40000"/>
-                  </a:schemeClr>
-                </a:solidFill>
-              </a:rPr>
-              <a:t>#### From command line</a:t>
-            </a:r>
-            <a:endParaRPr lang="en-US" sz="2400" dirty="0">
-              <a:solidFill>
-                <a:schemeClr val="accent6">
-                  <a:lumMod val="60000"/>
-                  <a:lumOff val="40000"/>
-                </a:schemeClr>
-              </a:solidFill>
-            </a:endParaRPr>
-          </a:p>
-          <a:p>
-            <a:endParaRPr lang="en-US" sz="2400" dirty="0">
-              <a:solidFill>
-                <a:schemeClr val="accent6">
-                  <a:lumMod val="60000"/>
-                  <a:lumOff val="40000"/>
-                </a:schemeClr>
-              </a:solidFill>
-            </a:endParaRPr>
-          </a:p>
-          <a:p>
-            <a:r>
-              <a:rPr lang="en-US" sz="2400" dirty="0">
-                <a:solidFill>
-                  <a:schemeClr val="accent6">
-                    <a:lumMod val="60000"/>
-                    <a:lumOff val="40000"/>
-                  </a:schemeClr>
-                </a:solidFill>
-              </a:rPr>
-              <a:t>&gt; .\.</a:t>
-            </a:r>
-            <a:r>
-              <a:rPr lang="en-US" sz="2400" dirty="0" err="1">
-                <a:solidFill>
-                  <a:schemeClr val="accent6">
-                    <a:lumMod val="60000"/>
-                    <a:lumOff val="40000"/>
-                  </a:schemeClr>
-                </a:solidFill>
-              </a:rPr>
-              <a:t>venv</a:t>
-            </a:r>
-            <a:r>
-              <a:rPr lang="en-US" sz="2400" dirty="0">
-                <a:solidFill>
-                  <a:schemeClr val="accent6">
-                    <a:lumMod val="60000"/>
-                    <a:lumOff val="40000"/>
-                  </a:schemeClr>
-                </a:solidFill>
-              </a:rPr>
-              <a:t>\Scripts\python.exe pip install </a:t>
-            </a:r>
-            <a:r>
-              <a:rPr lang="en-US" sz="2400" dirty="0" err="1">
-                <a:solidFill>
-                  <a:schemeClr val="accent6">
-                    <a:lumMod val="60000"/>
-                    <a:lumOff val="40000"/>
-                  </a:schemeClr>
-                </a:solidFill>
-              </a:rPr>
-              <a:t>langchain</a:t>
-            </a:r>
-            <a:r>
-              <a:rPr lang="en-US" sz="2400" dirty="0">
-                <a:solidFill>
-                  <a:schemeClr val="accent6">
-                    <a:lumMod val="60000"/>
-                    <a:lumOff val="40000"/>
-                  </a:schemeClr>
-                </a:solidFill>
-              </a:rPr>
-              <a:t>==0.2.14 </a:t>
-            </a:r>
-            <a:r>
-              <a:rPr lang="en-US" sz="2400" dirty="0" err="1">
-                <a:solidFill>
-                  <a:schemeClr val="accent6">
-                    <a:lumMod val="60000"/>
-                    <a:lumOff val="40000"/>
-                  </a:schemeClr>
-                </a:solidFill>
-              </a:rPr>
-              <a:t>langchain</a:t>
-            </a:r>
-            <a:r>
-              <a:rPr lang="en-US" sz="2400" dirty="0">
-                <a:solidFill>
-                  <a:schemeClr val="accent6">
-                    <a:lumMod val="60000"/>
-                    <a:lumOff val="40000"/>
-                  </a:schemeClr>
-                </a:solidFill>
-              </a:rPr>
-              <a:t>-community==0.2.12 </a:t>
-            </a:r>
-            <a:r>
-              <a:rPr lang="en-US" sz="2400" dirty="0" err="1">
-                <a:solidFill>
-                  <a:schemeClr val="accent6">
-                    <a:lumMod val="60000"/>
-                    <a:lumOff val="40000"/>
-                  </a:schemeClr>
-                </a:solidFill>
-              </a:rPr>
-              <a:t>langchain-openai</a:t>
-            </a:r>
-            <a:r>
-              <a:rPr lang="en-US" sz="2400" dirty="0">
-                <a:solidFill>
-                  <a:schemeClr val="accent6">
-                    <a:lumMod val="60000"/>
-                    <a:lumOff val="40000"/>
-                  </a:schemeClr>
-                </a:solidFill>
-              </a:rPr>
-              <a:t>==0.1.25 </a:t>
-            </a:r>
-          </a:p>
-          <a:p>
-            <a:endParaRPr lang="en-US" sz="2400" dirty="0">
-              <a:solidFill>
-                <a:schemeClr val="accent6">
-                  <a:lumMod val="60000"/>
-                  <a:lumOff val="40000"/>
-                </a:schemeClr>
-              </a:solidFill>
-            </a:endParaRPr>
-          </a:p>
-          <a:p>
-            <a:r>
-              <a:rPr lang="en-US" sz="2400" b="1" u="sng" dirty="0">
-                <a:solidFill>
-                  <a:schemeClr val="accent6">
-                    <a:lumMod val="60000"/>
-                    <a:lumOff val="40000"/>
-                  </a:schemeClr>
-                </a:solidFill>
-              </a:rPr>
-              <a:t>R</a:t>
-            </a:r>
-            <a:r>
-              <a:rPr lang="en-US" sz="2400" b="1" u="sng">
-                <a:solidFill>
-                  <a:schemeClr val="accent6">
-                    <a:lumMod val="60000"/>
-                    <a:lumOff val="40000"/>
-                  </a:schemeClr>
-                </a:solidFill>
-              </a:rPr>
-              <a:t>estart the Kernel (To be Safe)</a:t>
-            </a:r>
-            <a:endParaRPr lang="en-US" sz="2400" b="1" u="sng" dirty="0">
-              <a:solidFill>
-                <a:schemeClr val="accent6">
-                  <a:lumMod val="60000"/>
-                  <a:lumOff val="40000"/>
-                </a:schemeClr>
-              </a:solidFill>
-            </a:endParaRPr>
-          </a:p>
-          <a:p>
-            <a:br>
-              <a:rPr lang="en-US" sz="2400" dirty="0">
-                <a:solidFill>
-                  <a:schemeClr val="accent6">
-                    <a:lumMod val="60000"/>
-                    <a:lumOff val="40000"/>
-                  </a:schemeClr>
-                </a:solidFill>
-              </a:rPr>
-            </a:br>
-            <a:endParaRPr lang="en-US" sz="2400" dirty="0">
-              <a:solidFill>
-                <a:schemeClr val="accent6">
-                  <a:lumMod val="60000"/>
-                  <a:lumOff val="40000"/>
-                </a:schemeClr>
-              </a:solidFill>
-            </a:endParaRPr>
-          </a:p>
-        </p:txBody>
-      </p:sp>
-    </p:spTree>
-    <p:extLst>
-      <p:ext uri="{BB962C8B-B14F-4D97-AF65-F5344CB8AC3E}">
-        <p14:creationId xmlns:p14="http://schemas.microsoft.com/office/powerpoint/2010/main" val="3837488359"/>
-      </p:ext>
-    </p:extLst>
-  </p:cSld>
-  <p:clrMapOvr>
-    <a:masterClrMapping/>
-  </p:clrMapOvr>
-</p:sld>
-</file>
-
-<file path=ppt/slides/slide5.xml><?xml version="1.0" encoding="utf-8"?>
 <p:sld xmlns:a="http://schemas.openxmlformats.org/drawingml/2006/main" xmlns:r="http://schemas.openxmlformats.org/officeDocument/2006/relationships" xmlns:p="http://schemas.openxmlformats.org/presentationml/2006/main">
   <p:cSld>
     <p:spTree>
